--- a/delivery/slides/Team_8.pptx
+++ b/delivery/slides/Team_8.pptx
@@ -38,6 +38,7 @@
     <p:sldId id="286" r:id="rId37"/>
     <p:sldId id="287" r:id="rId38"/>
     <p:sldId id="288" r:id="rId39"/>
+    <p:sldId id="289" r:id="rId40"/>
   </p:sldIdLst>
   <p:sldSz cx="12191695" cy="6858000" type="screen4x3"/>
   <p:notesSz cx="6858000" cy="9144000"/>
@@ -4215,6 +4216,48 @@
       <p:pic>
         <p:nvPicPr>
           <p:cNvPr id="2" name="Picture 1" descr="p-33.png"/>
+          <p:cNvPicPr>
+            <a:picLocks noChangeAspect="1"/>
+          </p:cNvPicPr>
+          <p:nvPr/>
+        </p:nvPicPr>
+        <p:blipFill>
+          <a:blip r:embed="rId2"/>
+          <a:stretch>
+            <a:fillRect/>
+          </a:stretch>
+        </p:blipFill>
+        <p:spPr>
+          <a:xfrm>
+            <a:off x="0" y="0"/>
+            <a:ext cx="12191695" cy="6858000"/>
+          </a:xfrm>
+          <a:prstGeom prst="rect">
+            <a:avLst/>
+          </a:prstGeom>
+        </p:spPr>
+      </p:pic>
+    </p:spTree>
+  </p:cSld>
+  <p:clrMapOvr>
+    <a:masterClrMapping/>
+  </p:clrMapOvr>
+</p:sld>
+</file>
+
+<file path=ppt/slides/slide34.xml><?xml version="1.0" encoding="utf-8"?>
+<p:sld xmlns:a="http://schemas.openxmlformats.org/drawingml/2006/main" xmlns:p="http://schemas.openxmlformats.org/presentationml/2006/main" xmlns:r="http://schemas.openxmlformats.org/officeDocument/2006/relationships">
+  <p:cSld>
+    <p:spTree>
+      <p:nvGrpSpPr>
+        <p:cNvPr id="1" name=""/>
+        <p:cNvGrpSpPr/>
+        <p:nvPr/>
+      </p:nvGrpSpPr>
+      <p:grpSpPr/>
+      <p:pic>
+        <p:nvPicPr>
+          <p:cNvPr id="2" name="Picture 1" descr="p-34.png"/>
           <p:cNvPicPr>
             <a:picLocks noChangeAspect="1"/>
           </p:cNvPicPr>

--- a/delivery/slides/Team_8.pptx
+++ b/delivery/slides/Team_8.pptx
@@ -40,7 +40,7 @@
     <p:sldId id="288" r:id="rId39"/>
     <p:sldId id="289" r:id="rId40"/>
   </p:sldIdLst>
-  <p:sldSz cx="12191695" cy="6858000" type="screen4x3"/>
+  <p:sldSz cx="5760720" cy="3243072" type="screen4x3"/>
   <p:notesSz cx="6858000" cy="9144000"/>
   <p:defaultTextStyle>
     <a:defPPr>
@@ -3138,7 +3138,7 @@
         <p:spPr>
           <a:xfrm>
             <a:off x="0" y="0"/>
-            <a:ext cx="12191695" cy="6858000"/>
+            <a:ext cx="5760720" cy="3243072"/>
           </a:xfrm>
           <a:prstGeom prst="rect">
             <a:avLst/>
@@ -3180,7 +3180,7 @@
         <p:spPr>
           <a:xfrm>
             <a:off x="0" y="0"/>
-            <a:ext cx="12191695" cy="6858000"/>
+            <a:ext cx="5760720" cy="3243072"/>
           </a:xfrm>
           <a:prstGeom prst="rect">
             <a:avLst/>
@@ -3222,7 +3222,7 @@
         <p:spPr>
           <a:xfrm>
             <a:off x="0" y="0"/>
-            <a:ext cx="12191695" cy="6858000"/>
+            <a:ext cx="5760720" cy="3243072"/>
           </a:xfrm>
           <a:prstGeom prst="rect">
             <a:avLst/>
@@ -3264,7 +3264,7 @@
         <p:spPr>
           <a:xfrm>
             <a:off x="0" y="0"/>
-            <a:ext cx="12191695" cy="6858000"/>
+            <a:ext cx="5760720" cy="3243072"/>
           </a:xfrm>
           <a:prstGeom prst="rect">
             <a:avLst/>
@@ -3306,7 +3306,7 @@
         <p:spPr>
           <a:xfrm>
             <a:off x="0" y="0"/>
-            <a:ext cx="12191695" cy="6858000"/>
+            <a:ext cx="5760720" cy="3243072"/>
           </a:xfrm>
           <a:prstGeom prst="rect">
             <a:avLst/>
@@ -3348,7 +3348,7 @@
         <p:spPr>
           <a:xfrm>
             <a:off x="0" y="0"/>
-            <a:ext cx="12191695" cy="6858000"/>
+            <a:ext cx="5760720" cy="3243072"/>
           </a:xfrm>
           <a:prstGeom prst="rect">
             <a:avLst/>
@@ -3390,7 +3390,7 @@
         <p:spPr>
           <a:xfrm>
             <a:off x="0" y="0"/>
-            <a:ext cx="12191695" cy="6858000"/>
+            <a:ext cx="5760720" cy="3243072"/>
           </a:xfrm>
           <a:prstGeom prst="rect">
             <a:avLst/>
@@ -3432,7 +3432,7 @@
         <p:spPr>
           <a:xfrm>
             <a:off x="0" y="0"/>
-            <a:ext cx="12191695" cy="6858000"/>
+            <a:ext cx="5760720" cy="3243072"/>
           </a:xfrm>
           <a:prstGeom prst="rect">
             <a:avLst/>
@@ -3474,7 +3474,7 @@
         <p:spPr>
           <a:xfrm>
             <a:off x="0" y="0"/>
-            <a:ext cx="12191695" cy="6858000"/>
+            <a:ext cx="5760720" cy="3243072"/>
           </a:xfrm>
           <a:prstGeom prst="rect">
             <a:avLst/>
@@ -3516,7 +3516,7 @@
         <p:spPr>
           <a:xfrm>
             <a:off x="0" y="0"/>
-            <a:ext cx="12191695" cy="6858000"/>
+            <a:ext cx="5760720" cy="3243072"/>
           </a:xfrm>
           <a:prstGeom prst="rect">
             <a:avLst/>
@@ -3558,7 +3558,7 @@
         <p:spPr>
           <a:xfrm>
             <a:off x="0" y="0"/>
-            <a:ext cx="12191695" cy="6858000"/>
+            <a:ext cx="5760720" cy="3243072"/>
           </a:xfrm>
           <a:prstGeom prst="rect">
             <a:avLst/>
@@ -3600,7 +3600,7 @@
         <p:spPr>
           <a:xfrm>
             <a:off x="0" y="0"/>
-            <a:ext cx="12191695" cy="6858000"/>
+            <a:ext cx="5760720" cy="3243072"/>
           </a:xfrm>
           <a:prstGeom prst="rect">
             <a:avLst/>
@@ -3642,7 +3642,7 @@
         <p:spPr>
           <a:xfrm>
             <a:off x="0" y="0"/>
-            <a:ext cx="12191695" cy="6858000"/>
+            <a:ext cx="5760720" cy="3243072"/>
           </a:xfrm>
           <a:prstGeom prst="rect">
             <a:avLst/>
@@ -3684,7 +3684,7 @@
         <p:spPr>
           <a:xfrm>
             <a:off x="0" y="0"/>
-            <a:ext cx="12191695" cy="6858000"/>
+            <a:ext cx="5760720" cy="3243072"/>
           </a:xfrm>
           <a:prstGeom prst="rect">
             <a:avLst/>
@@ -3726,7 +3726,7 @@
         <p:spPr>
           <a:xfrm>
             <a:off x="0" y="0"/>
-            <a:ext cx="12191695" cy="6858000"/>
+            <a:ext cx="5760720" cy="3243072"/>
           </a:xfrm>
           <a:prstGeom prst="rect">
             <a:avLst/>
@@ -3768,7 +3768,7 @@
         <p:spPr>
           <a:xfrm>
             <a:off x="0" y="0"/>
-            <a:ext cx="12191695" cy="6858000"/>
+            <a:ext cx="5760720" cy="3243072"/>
           </a:xfrm>
           <a:prstGeom prst="rect">
             <a:avLst/>
@@ -3810,7 +3810,7 @@
         <p:spPr>
           <a:xfrm>
             <a:off x="0" y="0"/>
-            <a:ext cx="12191695" cy="6858000"/>
+            <a:ext cx="5760720" cy="3243072"/>
           </a:xfrm>
           <a:prstGeom prst="rect">
             <a:avLst/>
@@ -3852,7 +3852,7 @@
         <p:spPr>
           <a:xfrm>
             <a:off x="0" y="0"/>
-            <a:ext cx="12191695" cy="6858000"/>
+            <a:ext cx="5760720" cy="3243072"/>
           </a:xfrm>
           <a:prstGeom prst="rect">
             <a:avLst/>
@@ -3894,7 +3894,7 @@
         <p:spPr>
           <a:xfrm>
             <a:off x="0" y="0"/>
-            <a:ext cx="12191695" cy="6858000"/>
+            <a:ext cx="5760720" cy="3243072"/>
           </a:xfrm>
           <a:prstGeom prst="rect">
             <a:avLst/>
@@ -3936,7 +3936,7 @@
         <p:spPr>
           <a:xfrm>
             <a:off x="0" y="0"/>
-            <a:ext cx="12191695" cy="6858000"/>
+            <a:ext cx="5760720" cy="3243072"/>
           </a:xfrm>
           <a:prstGeom prst="rect">
             <a:avLst/>
@@ -3978,7 +3978,7 @@
         <p:spPr>
           <a:xfrm>
             <a:off x="0" y="0"/>
-            <a:ext cx="12191695" cy="6858000"/>
+            <a:ext cx="5760720" cy="3243072"/>
           </a:xfrm>
           <a:prstGeom prst="rect">
             <a:avLst/>
@@ -4020,7 +4020,7 @@
         <p:spPr>
           <a:xfrm>
             <a:off x="0" y="0"/>
-            <a:ext cx="12191695" cy="6858000"/>
+            <a:ext cx="5760720" cy="3243072"/>
           </a:xfrm>
           <a:prstGeom prst="rect">
             <a:avLst/>
@@ -4062,7 +4062,7 @@
         <p:spPr>
           <a:xfrm>
             <a:off x="0" y="0"/>
-            <a:ext cx="12191695" cy="6858000"/>
+            <a:ext cx="5760720" cy="3243072"/>
           </a:xfrm>
           <a:prstGeom prst="rect">
             <a:avLst/>
@@ -4104,7 +4104,7 @@
         <p:spPr>
           <a:xfrm>
             <a:off x="0" y="0"/>
-            <a:ext cx="12191695" cy="6858000"/>
+            <a:ext cx="5760720" cy="3243072"/>
           </a:xfrm>
           <a:prstGeom prst="rect">
             <a:avLst/>
@@ -4146,7 +4146,7 @@
         <p:spPr>
           <a:xfrm>
             <a:off x="0" y="0"/>
-            <a:ext cx="12191695" cy="6858000"/>
+            <a:ext cx="5760720" cy="3243072"/>
           </a:xfrm>
           <a:prstGeom prst="rect">
             <a:avLst/>
@@ -4188,7 +4188,7 @@
         <p:spPr>
           <a:xfrm>
             <a:off x="0" y="0"/>
-            <a:ext cx="12191695" cy="6858000"/>
+            <a:ext cx="5760720" cy="3243072"/>
           </a:xfrm>
           <a:prstGeom prst="rect">
             <a:avLst/>
@@ -4230,7 +4230,7 @@
         <p:spPr>
           <a:xfrm>
             <a:off x="0" y="0"/>
-            <a:ext cx="12191695" cy="6858000"/>
+            <a:ext cx="5760720" cy="3243072"/>
           </a:xfrm>
           <a:prstGeom prst="rect">
             <a:avLst/>
@@ -4272,7 +4272,7 @@
         <p:spPr>
           <a:xfrm>
             <a:off x="0" y="0"/>
-            <a:ext cx="12191695" cy="6858000"/>
+            <a:ext cx="5760720" cy="3243072"/>
           </a:xfrm>
           <a:prstGeom prst="rect">
             <a:avLst/>
@@ -4314,7 +4314,7 @@
         <p:spPr>
           <a:xfrm>
             <a:off x="0" y="0"/>
-            <a:ext cx="12191695" cy="6858000"/>
+            <a:ext cx="5760720" cy="3243072"/>
           </a:xfrm>
           <a:prstGeom prst="rect">
             <a:avLst/>
@@ -4356,7 +4356,7 @@
         <p:spPr>
           <a:xfrm>
             <a:off x="0" y="0"/>
-            <a:ext cx="12191695" cy="6858000"/>
+            <a:ext cx="5760720" cy="3243072"/>
           </a:xfrm>
           <a:prstGeom prst="rect">
             <a:avLst/>
@@ -4398,7 +4398,7 @@
         <p:spPr>
           <a:xfrm>
             <a:off x="0" y="0"/>
-            <a:ext cx="12191695" cy="6858000"/>
+            <a:ext cx="5760720" cy="3243072"/>
           </a:xfrm>
           <a:prstGeom prst="rect">
             <a:avLst/>
@@ -4440,7 +4440,7 @@
         <p:spPr>
           <a:xfrm>
             <a:off x="0" y="0"/>
-            <a:ext cx="12191695" cy="6858000"/>
+            <a:ext cx="5760720" cy="3243072"/>
           </a:xfrm>
           <a:prstGeom prst="rect">
             <a:avLst/>
@@ -4482,7 +4482,7 @@
         <p:spPr>
           <a:xfrm>
             <a:off x="0" y="0"/>
-            <a:ext cx="12191695" cy="6858000"/>
+            <a:ext cx="5760720" cy="3243072"/>
           </a:xfrm>
           <a:prstGeom prst="rect">
             <a:avLst/>
@@ -4524,7 +4524,7 @@
         <p:spPr>
           <a:xfrm>
             <a:off x="0" y="0"/>
-            <a:ext cx="12191695" cy="6858000"/>
+            <a:ext cx="5760720" cy="3243072"/>
           </a:xfrm>
           <a:prstGeom prst="rect">
             <a:avLst/>

--- a/delivery/slides/Team_8.pptx
+++ b/delivery/slides/Team_8.pptx
@@ -39,6 +39,7 @@
     <p:sldId id="287" r:id="rId38"/>
     <p:sldId id="288" r:id="rId39"/>
     <p:sldId id="289" r:id="rId40"/>
+    <p:sldId id="290" r:id="rId41"/>
   </p:sldIdLst>
   <p:sldSz cx="5760720" cy="3243072" type="screen4x3"/>
   <p:notesSz cx="6858000" cy="9144000"/>
@@ -4258,6 +4259,48 @@
       <p:pic>
         <p:nvPicPr>
           <p:cNvPr id="2" name="Picture 1" descr="p-34.png"/>
+          <p:cNvPicPr>
+            <a:picLocks noChangeAspect="1"/>
+          </p:cNvPicPr>
+          <p:nvPr/>
+        </p:nvPicPr>
+        <p:blipFill>
+          <a:blip r:embed="rId2"/>
+          <a:stretch>
+            <a:fillRect/>
+          </a:stretch>
+        </p:blipFill>
+        <p:spPr>
+          <a:xfrm>
+            <a:off x="0" y="0"/>
+            <a:ext cx="5760720" cy="3243072"/>
+          </a:xfrm>
+          <a:prstGeom prst="rect">
+            <a:avLst/>
+          </a:prstGeom>
+        </p:spPr>
+      </p:pic>
+    </p:spTree>
+  </p:cSld>
+  <p:clrMapOvr>
+    <a:masterClrMapping/>
+  </p:clrMapOvr>
+</p:sld>
+</file>
+
+<file path=ppt/slides/slide35.xml><?xml version="1.0" encoding="utf-8"?>
+<p:sld xmlns:a="http://schemas.openxmlformats.org/drawingml/2006/main" xmlns:p="http://schemas.openxmlformats.org/presentationml/2006/main" xmlns:r="http://schemas.openxmlformats.org/officeDocument/2006/relationships">
+  <p:cSld>
+    <p:spTree>
+      <p:nvGrpSpPr>
+        <p:cNvPr id="1" name=""/>
+        <p:cNvGrpSpPr/>
+        <p:nvPr/>
+      </p:nvGrpSpPr>
+      <p:grpSpPr/>
+      <p:pic>
+        <p:nvPicPr>
+          <p:cNvPr id="2" name="Picture 1" descr="p-35.png"/>
           <p:cNvPicPr>
             <a:picLocks noChangeAspect="1"/>
           </p:cNvPicPr>
